--- a/KI Grundlagen.pptx
+++ b/KI Grundlagen.pptx
@@ -266,7 +266,7 @@
           <a:p>
             <a:fld id="{BCACF5CE-CE6F-4B33-8271-848EF84474F6}" type="datetimeFigureOut">
               <a:rPr lang="de-DE" smtClean="0"/>
-              <a:t>30.01.2025</a:t>
+              <a:t>03.04.2025</a:t>
             </a:fld>
             <a:endParaRPr lang="de-DE"/>
           </a:p>
@@ -464,7 +464,7 @@
           <a:p>
             <a:fld id="{BCACF5CE-CE6F-4B33-8271-848EF84474F6}" type="datetimeFigureOut">
               <a:rPr lang="de-DE" smtClean="0"/>
-              <a:t>30.01.2025</a:t>
+              <a:t>03.04.2025</a:t>
             </a:fld>
             <a:endParaRPr lang="de-DE"/>
           </a:p>
@@ -672,7 +672,7 @@
           <a:p>
             <a:fld id="{BCACF5CE-CE6F-4B33-8271-848EF84474F6}" type="datetimeFigureOut">
               <a:rPr lang="de-DE" smtClean="0"/>
-              <a:t>30.01.2025</a:t>
+              <a:t>03.04.2025</a:t>
             </a:fld>
             <a:endParaRPr lang="de-DE"/>
           </a:p>
@@ -870,7 +870,7 @@
           <a:p>
             <a:fld id="{BCACF5CE-CE6F-4B33-8271-848EF84474F6}" type="datetimeFigureOut">
               <a:rPr lang="de-DE" smtClean="0"/>
-              <a:t>30.01.2025</a:t>
+              <a:t>03.04.2025</a:t>
             </a:fld>
             <a:endParaRPr lang="de-DE"/>
           </a:p>
@@ -1145,7 +1145,7 @@
           <a:p>
             <a:fld id="{BCACF5CE-CE6F-4B33-8271-848EF84474F6}" type="datetimeFigureOut">
               <a:rPr lang="de-DE" smtClean="0"/>
-              <a:t>30.01.2025</a:t>
+              <a:t>03.04.2025</a:t>
             </a:fld>
             <a:endParaRPr lang="de-DE"/>
           </a:p>
@@ -1410,7 +1410,7 @@
           <a:p>
             <a:fld id="{BCACF5CE-CE6F-4B33-8271-848EF84474F6}" type="datetimeFigureOut">
               <a:rPr lang="de-DE" smtClean="0"/>
-              <a:t>30.01.2025</a:t>
+              <a:t>03.04.2025</a:t>
             </a:fld>
             <a:endParaRPr lang="de-DE"/>
           </a:p>
@@ -1822,7 +1822,7 @@
           <a:p>
             <a:fld id="{BCACF5CE-CE6F-4B33-8271-848EF84474F6}" type="datetimeFigureOut">
               <a:rPr lang="de-DE" smtClean="0"/>
-              <a:t>30.01.2025</a:t>
+              <a:t>03.04.2025</a:t>
             </a:fld>
             <a:endParaRPr lang="de-DE"/>
           </a:p>
@@ -1963,7 +1963,7 @@
           <a:p>
             <a:fld id="{BCACF5CE-CE6F-4B33-8271-848EF84474F6}" type="datetimeFigureOut">
               <a:rPr lang="de-DE" smtClean="0"/>
-              <a:t>30.01.2025</a:t>
+              <a:t>03.04.2025</a:t>
             </a:fld>
             <a:endParaRPr lang="de-DE"/>
           </a:p>
@@ -2076,7 +2076,7 @@
           <a:p>
             <a:fld id="{BCACF5CE-CE6F-4B33-8271-848EF84474F6}" type="datetimeFigureOut">
               <a:rPr lang="de-DE" smtClean="0"/>
-              <a:t>30.01.2025</a:t>
+              <a:t>03.04.2025</a:t>
             </a:fld>
             <a:endParaRPr lang="de-DE"/>
           </a:p>
@@ -2387,7 +2387,7 @@
           <a:p>
             <a:fld id="{BCACF5CE-CE6F-4B33-8271-848EF84474F6}" type="datetimeFigureOut">
               <a:rPr lang="de-DE" smtClean="0"/>
-              <a:t>30.01.2025</a:t>
+              <a:t>03.04.2025</a:t>
             </a:fld>
             <a:endParaRPr lang="de-DE"/>
           </a:p>
@@ -2675,7 +2675,7 @@
           <a:p>
             <a:fld id="{BCACF5CE-CE6F-4B33-8271-848EF84474F6}" type="datetimeFigureOut">
               <a:rPr lang="de-DE" smtClean="0"/>
-              <a:t>30.01.2025</a:t>
+              <a:t>03.04.2025</a:t>
             </a:fld>
             <a:endParaRPr lang="de-DE"/>
           </a:p>
@@ -2918,7 +2918,7 @@
             <a:fld id="{BCACF5CE-CE6F-4B33-8271-848EF84474F6}" type="datetimeFigureOut">
               <a:rPr lang="de-DE" smtClean="0"/>
               <a:pPr/>
-              <a:t>30.01.2025</a:t>
+              <a:t>03.04.2025</a:t>
             </a:fld>
             <a:endParaRPr lang="de-DE"/>
           </a:p>
@@ -4185,7 +4185,7 @@
               <a:rPr lang="de-DE" dirty="0">
                 <a:sym typeface="Wingdings" panose="05000000000000000000" pitchFamily="2" charset="2"/>
               </a:rPr>
-              <a:t>(GPT-3/4/4o, Gemini, Llama3, Claude 3, </a:t>
+              <a:t>(GPT-4o, Gemini, Llama3, Claude 3, </a:t>
             </a:r>
             <a:r>
               <a:rPr lang="de-DE" dirty="0" err="1">
